--- a/output/education/2026-03-29_healthcare-ai-ethics/healthcare-ai-ethics_slides_allstaff.pptx
+++ b/output/education/2026-03-29_healthcare-ai-ethics/healthcare-ai-ethics_slides_allstaff.pptx
@@ -3133,6 +3133,7 @@
               </a:defRPr>
             </a:pPr>
             <a:r>
+              <a:rPr/>
               <a:t>医療AIの倫理 — 知っておきたい6つのチェックポイント</a:t>
             </a:r>
           </a:p>
@@ -3147,7 +3148,7 @@
         <p:spPr>
           <a:xfrm>
             <a:off x="457200" y="1371600"/>
-            <a:ext cx="8229600" cy="365760"/>
+            <a:ext cx="8229600" cy="375920"/>
           </a:xfrm>
           <a:prstGeom prst="rect">
             <a:avLst/>
@@ -3169,6 +3170,7 @@
               </a:defRPr>
             </a:pPr>
             <a:r>
+              <a:rPr/>
               <a:t>全スタッフ向け（10分）</a:t>
             </a:r>
           </a:p>
@@ -3213,7 +3215,9 @@
           <a:bodyPr rtlCol="0" anchor="ctr"/>
           <a:lstStyle/>
           <a:p>
-            <a:pPr algn="ctr"/>
+            <a:pPr algn="ctr">
+              <a:defRPr/>
+            </a:pPr>
           </a:p>
         </p:txBody>
       </p:sp>
@@ -3256,7 +3260,9 @@
           <a:bodyPr rtlCol="0" anchor="ctr"/>
           <a:lstStyle/>
           <a:p>
-            <a:pPr algn="ctr"/>
+            <a:pPr algn="ctr">
+              <a:defRPr/>
+            </a:pPr>
           </a:p>
         </p:txBody>
       </p:sp>
@@ -3301,7 +3307,9 @@
           <a:bodyPr rtlCol="0" anchor="ctr"/>
           <a:lstStyle/>
           <a:p>
-            <a:pPr algn="ctr"/>
+            <a:pPr algn="ctr">
+              <a:defRPr/>
+            </a:pPr>
           </a:p>
         </p:txBody>
       </p:sp>
@@ -3336,15 +3344,18 @@
               </a:defRPr>
             </a:pPr>
             <a:r>
+              <a:rPr/>
               <a:t>AIが「この患者さん、危ないです」と言ったら、皆さんどうしますか？</a:t>
             </a:r>
             <a:br/>
             <a:br/>
             <a:r>
+              <a:rPr/>
               <a:t>今日のゴール: AIを安全に使うための「6つのチェックポイント」を知り、</a:t>
             </a:r>
             <a:br/>
             <a:r>
+              <a:rPr/>
               <a:t>自分の仕事に1つ当てはめられるようになる</a:t>
             </a:r>
           </a:p>
@@ -3385,7 +3396,7 @@
         <p:spPr>
           <a:xfrm>
             <a:off x="457200" y="274320"/>
-            <a:ext cx="8229600" cy="457200"/>
+            <a:ext cx="8229600" cy="482600"/>
           </a:xfrm>
           <a:prstGeom prst="rect">
             <a:avLst/>
@@ -3407,6 +3418,7 @@
               </a:defRPr>
             </a:pPr>
             <a:r>
+              <a:rPr/>
               <a:t>医療の世界でのAI活用の現在地</a:t>
             </a:r>
           </a:p>
@@ -3451,7 +3463,9 @@
           <a:bodyPr rtlCol="0" anchor="ctr"/>
           <a:lstStyle/>
           <a:p>
-            <a:pPr algn="ctr"/>
+            <a:pPr algn="ctr">
+              <a:defRPr/>
+            </a:pPr>
           </a:p>
         </p:txBody>
       </p:sp>
@@ -3891,7 +3905,9 @@
           <a:bodyPr rtlCol="0" anchor="ctr"/>
           <a:lstStyle/>
           <a:p>
-            <a:pPr algn="ctr"/>
+            <a:pPr algn="ctr">
+              <a:defRPr/>
+            </a:pPr>
           </a:p>
         </p:txBody>
       </p:sp>
@@ -3936,7 +3952,9 @@
           <a:bodyPr rtlCol="0" anchor="ctr"/>
           <a:lstStyle/>
           <a:p>
-            <a:pPr algn="ctr"/>
+            <a:pPr algn="ctr">
+              <a:defRPr/>
+            </a:pPr>
           </a:p>
         </p:txBody>
       </p:sp>
@@ -3949,7 +3967,7 @@
         <p:spPr>
           <a:xfrm>
             <a:off x="1600200" y="3730752"/>
-            <a:ext cx="6035040" cy="310896"/>
+            <a:ext cx="6035040" cy="322579"/>
           </a:xfrm>
           <a:prstGeom prst="rect">
             <a:avLst/>
@@ -3971,6 +3989,7 @@
               </a:defRPr>
             </a:pPr>
             <a:r>
+              <a:rPr/>
               <a:t>AIは「道具」であり、最終判断は必ず人間が行います</a:t>
             </a:r>
           </a:p>
@@ -4011,7 +4030,7 @@
         <p:spPr>
           <a:xfrm>
             <a:off x="457200" y="274320"/>
-            <a:ext cx="8229600" cy="457200"/>
+            <a:ext cx="8229600" cy="482600"/>
           </a:xfrm>
           <a:prstGeom prst="rect">
             <a:avLst/>
@@ -4033,6 +4052,7 @@
               </a:defRPr>
             </a:pPr>
             <a:r>
+              <a:rPr/>
               <a:t>6つのチェックポイント</a:t>
             </a:r>
           </a:p>
@@ -4077,7 +4097,9 @@
           <a:bodyPr rtlCol="0" anchor="ctr"/>
           <a:lstStyle/>
           <a:p>
-            <a:pPr algn="ctr"/>
+            <a:pPr algn="ctr">
+              <a:defRPr/>
+            </a:pPr>
           </a:p>
         </p:txBody>
       </p:sp>
@@ -4112,6 +4134,7 @@
               </a:defRPr>
             </a:pPr>
             <a:r>
+              <a:rPr/>
               <a:t>世界の研究22件から見えてきた倫理的課題（Wubineh et al., 2026）</a:t>
             </a:r>
           </a:p>
@@ -4158,7 +4181,9 @@
           <a:bodyPr rtlCol="0" anchor="ctr"/>
           <a:lstStyle/>
           <a:p>
-            <a:pPr algn="ctr"/>
+            <a:pPr algn="ctr">
+              <a:defRPr/>
+            </a:pPr>
           </a:p>
         </p:txBody>
       </p:sp>
@@ -4193,6 +4218,7 @@
               </a:defRPr>
             </a:pPr>
             <a:r>
+              <a:rPr/>
               <a:t>1. 透明性と信頼</a:t>
             </a:r>
           </a:p>
@@ -4229,6 +4255,7 @@
               </a:defRPr>
             </a:pPr>
             <a:r>
+              <a:rPr/>
               <a:t>AIがなぜそう判断したか、分かるか？</a:t>
             </a:r>
           </a:p>
@@ -4275,7 +4302,9 @@
           <a:bodyPr rtlCol="0" anchor="ctr"/>
           <a:lstStyle/>
           <a:p>
-            <a:pPr algn="ctr"/>
+            <a:pPr algn="ctr">
+              <a:defRPr/>
+            </a:pPr>
           </a:p>
         </p:txBody>
       </p:sp>
@@ -4310,6 +4339,7 @@
               </a:defRPr>
             </a:pPr>
             <a:r>
+              <a:rPr/>
               <a:t>2. 偏り（バイアス）と公平性</a:t>
             </a:r>
           </a:p>
@@ -4346,6 +4376,7 @@
               </a:defRPr>
             </a:pPr>
             <a:r>
+              <a:rPr/>
               <a:t>全ての患者さんに同じように正確か？</a:t>
             </a:r>
           </a:p>
@@ -4392,7 +4423,9 @@
           <a:bodyPr rtlCol="0" anchor="ctr"/>
           <a:lstStyle/>
           <a:p>
-            <a:pPr algn="ctr"/>
+            <a:pPr algn="ctr">
+              <a:defRPr/>
+            </a:pPr>
           </a:p>
         </p:txBody>
       </p:sp>
@@ -4427,6 +4460,7 @@
               </a:defRPr>
             </a:pPr>
             <a:r>
+              <a:rPr/>
               <a:t>3. プライバシー</a:t>
             </a:r>
           </a:p>
@@ -4463,6 +4497,7 @@
               </a:defRPr>
             </a:pPr>
             <a:r>
+              <a:rPr/>
               <a:t>患者さんのデータは守られているか？</a:t>
             </a:r>
           </a:p>
@@ -4509,7 +4544,9 @@
           <a:bodyPr rtlCol="0" anchor="ctr"/>
           <a:lstStyle/>
           <a:p>
-            <a:pPr algn="ctr"/>
+            <a:pPr algn="ctr">
+              <a:defRPr/>
+            </a:pPr>
           </a:p>
         </p:txBody>
       </p:sp>
@@ -4544,6 +4581,7 @@
               </a:defRPr>
             </a:pPr>
             <a:r>
+              <a:rPr/>
               <a:t>4. 責任の所在</a:t>
             </a:r>
           </a:p>
@@ -4580,6 +4618,7 @@
               </a:defRPr>
             </a:pPr>
             <a:r>
+              <a:rPr/>
               <a:t>間違いがあったら誰が責任を取るか？</a:t>
             </a:r>
           </a:p>
@@ -4626,7 +4665,9 @@
           <a:bodyPr rtlCol="0" anchor="ctr"/>
           <a:lstStyle/>
           <a:p>
-            <a:pPr algn="ctr"/>
+            <a:pPr algn="ctr">
+              <a:defRPr/>
+            </a:pPr>
           </a:p>
         </p:txBody>
       </p:sp>
@@ -4661,6 +4702,7 @@
               </a:defRPr>
             </a:pPr>
             <a:r>
+              <a:rPr/>
               <a:t>5. 道徳的な問題</a:t>
             </a:r>
           </a:p>
@@ -4697,6 +4739,7 @@
               </a:defRPr>
             </a:pPr>
             <a:r>
+              <a:rPr/>
               <a:t>AIに任せていいことの線引きは？</a:t>
             </a:r>
           </a:p>
@@ -4743,7 +4786,9 @@
           <a:bodyPr rtlCol="0" anchor="ctr"/>
           <a:lstStyle/>
           <a:p>
-            <a:pPr algn="ctr"/>
+            <a:pPr algn="ctr">
+              <a:defRPr/>
+            </a:pPr>
           </a:p>
         </p:txBody>
       </p:sp>
@@ -4778,6 +4823,7 @@
               </a:defRPr>
             </a:pPr>
             <a:r>
+              <a:rPr/>
               <a:t>6. 法律とルール</a:t>
             </a:r>
           </a:p>
@@ -4814,6 +4860,7 @@
               </a:defRPr>
             </a:pPr>
             <a:r>
+              <a:rPr/>
               <a:t>法整備は追いついているか？</a:t>
             </a:r>
           </a:p>
@@ -4854,7 +4901,7 @@
         <p:spPr>
           <a:xfrm>
             <a:off x="457200" y="274320"/>
-            <a:ext cx="8229600" cy="457200"/>
+            <a:ext cx="8229600" cy="482600"/>
           </a:xfrm>
           <a:prstGeom prst="rect">
             <a:avLst/>
@@ -4876,6 +4923,7 @@
               </a:defRPr>
             </a:pPr>
             <a:r>
+              <a:rPr/>
               <a:t>具体例で理解しよう — 「偏り（バイアス）」って何？</a:t>
             </a:r>
           </a:p>
@@ -4920,7 +4968,9 @@
           <a:bodyPr rtlCol="0" anchor="ctr"/>
           <a:lstStyle/>
           <a:p>
-            <a:pPr algn="ctr"/>
+            <a:pPr algn="ctr">
+              <a:defRPr/>
+            </a:pPr>
           </a:p>
         </p:txBody>
       </p:sp>
@@ -4963,7 +5013,9 @@
           <a:bodyPr rtlCol="0" anchor="ctr"/>
           <a:lstStyle/>
           <a:p>
-            <a:pPr algn="ctr"/>
+            <a:pPr algn="ctr">
+              <a:defRPr/>
+            </a:pPr>
           </a:p>
         </p:txBody>
       </p:sp>
@@ -5008,7 +5060,9 @@
           <a:bodyPr rtlCol="0" anchor="ctr"/>
           <a:lstStyle/>
           <a:p>
-            <a:pPr algn="ctr"/>
+            <a:pPr algn="ctr">
+              <a:defRPr/>
+            </a:pPr>
           </a:p>
         </p:txBody>
       </p:sp>
@@ -5043,14 +5097,17 @@
               </a:defRPr>
             </a:pPr>
             <a:r>
+              <a:rPr/>
               <a:t>皮膚科のAIが「良性です」と判断。</a:t>
             </a:r>
             <a:br/>
             <a:r>
+              <a:rPr/>
               <a:t>しかしこのAIは、明るい肌トーンの画像データで主に訓練されていた。</a:t>
             </a:r>
             <a:br/>
             <a:r>
+              <a:rPr/>
               <a:t>結果: 暗い肌トーンの患者さんでは、皮膚がんを見逃すリスクが上昇。</a:t>
             </a:r>
           </a:p>
@@ -5088,6 +5145,7 @@
               <a:buChar char="●"/>
             </a:pPr>
             <a:r>
+              <a:rPr/>
               <a:t>AIは訓練に使ったデータの特徴を学ぶ</a:t>
             </a:r>
           </a:p>
@@ -5102,6 +5160,7 @@
               <a:buChar char="●"/>
             </a:pPr>
             <a:r>
+              <a:rPr/>
               <a:t>データに偏りがあると、特定の患者さんで精度が下がる</a:t>
             </a:r>
           </a:p>
@@ -5116,6 +5175,7 @@
               <a:buChar char="●"/>
             </a:pPr>
             <a:r>
+              <a:rPr/>
               <a:t>高齢者、少数民族、農村部の住民はデータが少ないことが多い</a:t>
             </a:r>
           </a:p>
@@ -5152,6 +5212,7 @@
               </a:defRPr>
             </a:pPr>
             <a:r>
+              <a:rPr/>
               <a:t>あなたの職場では: 導入されたAIが「どんなデータで訓練されたか」を確認する習慣が大切</a:t>
             </a:r>
           </a:p>
@@ -5192,7 +5253,7 @@
         <p:spPr>
           <a:xfrm>
             <a:off x="457200" y="274320"/>
-            <a:ext cx="8229600" cy="457200"/>
+            <a:ext cx="8229600" cy="482600"/>
           </a:xfrm>
           <a:prstGeom prst="rect">
             <a:avLst/>
@@ -5214,6 +5275,7 @@
               </a:defRPr>
             </a:pPr>
             <a:r>
+              <a:rPr/>
               <a:t>グループ対話（3分）— 「うちの職場なら？」</a:t>
             </a:r>
           </a:p>
@@ -5258,7 +5320,9 @@
           <a:bodyPr rtlCol="0" anchor="ctr"/>
           <a:lstStyle/>
           <a:p>
-            <a:pPr algn="ctr"/>
+            <a:pPr algn="ctr">
+              <a:defRPr/>
+            </a:pPr>
           </a:p>
         </p:txBody>
       </p:sp>
@@ -5301,7 +5365,9 @@
           <a:bodyPr rtlCol="0" anchor="ctr"/>
           <a:lstStyle/>
           <a:p>
-            <a:pPr algn="ctr"/>
+            <a:pPr algn="ctr">
+              <a:defRPr/>
+            </a:pPr>
           </a:p>
         </p:txBody>
       </p:sp>
@@ -5346,7 +5412,9 @@
           <a:bodyPr rtlCol="0" anchor="ctr"/>
           <a:lstStyle/>
           <a:p>
-            <a:pPr algn="ctr"/>
+            <a:pPr algn="ctr">
+              <a:defRPr/>
+            </a:pPr>
           </a:p>
         </p:txBody>
       </p:sp>
@@ -5381,10 +5449,12 @@
               </a:defRPr>
             </a:pPr>
             <a:r>
+              <a:rPr/>
               <a:t>「もし自分の職場にAIが導入されたら、</a:t>
             </a:r>
             <a:br/>
             <a:r>
+              <a:rPr/>
               <a:t>6つのチェックポイントのうち、どれが一番気になる？」</a:t>
             </a:r>
           </a:p>
@@ -5751,7 +5821,7 @@
         <p:spPr>
           <a:xfrm>
             <a:off x="457200" y="274320"/>
-            <a:ext cx="8229600" cy="457200"/>
+            <a:ext cx="8229600" cy="482600"/>
           </a:xfrm>
           <a:prstGeom prst="rect">
             <a:avLst/>
@@ -5773,6 +5843,7 @@
               </a:defRPr>
             </a:pPr>
             <a:r>
+              <a:rPr/>
               <a:t>世界と日本の動き — ルールはどう変わっていくか</a:t>
             </a:r>
           </a:p>
@@ -5817,7 +5888,9 @@
           <a:bodyPr rtlCol="0" anchor="ctr"/>
           <a:lstStyle/>
           <a:p>
-            <a:pPr algn="ctr"/>
+            <a:pPr algn="ctr">
+              <a:defRPr/>
+            </a:pPr>
           </a:p>
         </p:txBody>
       </p:sp>
@@ -5862,7 +5935,9 @@
           <a:bodyPr rtlCol="0" anchor="ctr"/>
           <a:lstStyle/>
           <a:p>
-            <a:pPr algn="ctr"/>
+            <a:pPr algn="ctr">
+              <a:defRPr/>
+            </a:pPr>
           </a:p>
         </p:txBody>
       </p:sp>
@@ -5875,7 +5950,7 @@
         <p:spPr>
           <a:xfrm>
             <a:off x="640080" y="1188720"/>
-            <a:ext cx="3657600" cy="365760"/>
+            <a:ext cx="3657600" cy="375920"/>
           </a:xfrm>
           <a:prstGeom prst="rect">
             <a:avLst/>
@@ -5897,6 +5972,7 @@
               </a:defRPr>
             </a:pPr>
             <a:r>
+              <a:rPr/>
               <a:t>EU（ヨーロッパ）</a:t>
             </a:r>
           </a:p>
@@ -5934,6 +6010,7 @@
               <a:buChar char="●"/>
             </a:pPr>
             <a:r>
+              <a:rPr/>
               <a:t>EU AI法 2026年8月適用開始</a:t>
             </a:r>
           </a:p>
@@ -5948,6 +6025,7 @@
               <a:buChar char="●"/>
             </a:pPr>
             <a:r>
+              <a:rPr/>
               <a:t>医療AI = 高リスクAI → 技術文書・人間の監視義務化</a:t>
             </a:r>
           </a:p>
@@ -5962,6 +6040,7 @@
               <a:buChar char="●"/>
             </a:pPr>
             <a:r>
+              <a:rPr/>
               <a:t>スタッフのAIリテラシー教育も義務（2025年2月〜）</a:t>
             </a:r>
           </a:p>
@@ -6008,7 +6087,9 @@
           <a:bodyPr rtlCol="0" anchor="ctr"/>
           <a:lstStyle/>
           <a:p>
-            <a:pPr algn="ctr"/>
+            <a:pPr algn="ctr">
+              <a:defRPr/>
+            </a:pPr>
           </a:p>
         </p:txBody>
       </p:sp>
@@ -6021,7 +6102,7 @@
         <p:spPr>
           <a:xfrm>
             <a:off x="4937760" y="1188720"/>
-            <a:ext cx="3657600" cy="365760"/>
+            <a:ext cx="3657600" cy="375920"/>
           </a:xfrm>
           <a:prstGeom prst="rect">
             <a:avLst/>
@@ -6043,6 +6124,7 @@
               </a:defRPr>
             </a:pPr>
             <a:r>
+              <a:rPr/>
               <a:t>日本</a:t>
             </a:r>
           </a:p>
@@ -6080,6 +6162,7 @@
               <a:buChar char="●"/>
             </a:pPr>
             <a:r>
+              <a:rPr/>
               <a:t>AI推進法 2025年成立</a:t>
             </a:r>
           </a:p>
@@ -6094,6 +6177,7 @@
               <a:buChar char="●"/>
             </a:pPr>
             <a:r>
+              <a:rPr/>
               <a:t>厚労省 医療データAI利活用ガイドライン運用中</a:t>
             </a:r>
           </a:p>
@@ -6108,6 +6192,7 @@
               <a:buChar char="●"/>
             </a:pPr>
             <a:r>
+              <a:rPr/>
               <a:t>2026年度診療報酬改定でAI・ICT活用推進</a:t>
             </a:r>
           </a:p>
@@ -6152,7 +6237,9 @@
           <a:bodyPr rtlCol="0" anchor="ctr"/>
           <a:lstStyle/>
           <a:p>
-            <a:pPr algn="ctr"/>
+            <a:pPr algn="ctr">
+              <a:defRPr/>
+            </a:pPr>
           </a:p>
         </p:txBody>
       </p:sp>
@@ -6197,7 +6284,9 @@
           <a:bodyPr rtlCol="0" anchor="ctr"/>
           <a:lstStyle/>
           <a:p>
-            <a:pPr algn="ctr"/>
+            <a:pPr algn="ctr">
+              <a:defRPr/>
+            </a:pPr>
           </a:p>
         </p:txBody>
       </p:sp>
@@ -6232,6 +6321,7 @@
               </a:defRPr>
             </a:pPr>
             <a:r>
+              <a:rPr/>
               <a:t>「AIを使えること」だけでなく「AIを安全に使えること」が求められる時代へ</a:t>
             </a:r>
           </a:p>
@@ -6294,6 +6384,7 @@
               </a:defRPr>
             </a:pPr>
             <a:r>
+              <a:rPr/>
               <a:t>今日のまとめと明日からのアクション</a:t>
             </a:r>
           </a:p>
@@ -6338,7 +6429,9 @@
           <a:bodyPr rtlCol="0" anchor="ctr"/>
           <a:lstStyle/>
           <a:p>
-            <a:pPr algn="ctr"/>
+            <a:pPr algn="ctr">
+              <a:defRPr/>
+            </a:pPr>
           </a:p>
         </p:txBody>
       </p:sp>
@@ -6373,6 +6466,7 @@
               </a:defRPr>
             </a:pPr>
             <a:r>
+              <a:rPr/>
               <a:t>6つのチェックポイント: 透明性 / 偏り / プライバシー / 責任 / 道徳 / 法律</a:t>
             </a:r>
           </a:p>
@@ -6417,7 +6511,9 @@
           <a:bodyPr rtlCol="0" anchor="ctr"/>
           <a:lstStyle/>
           <a:p>
-            <a:pPr algn="ctr"/>
+            <a:pPr algn="ctr">
+              <a:defRPr/>
+            </a:pPr>
           </a:p>
         </p:txBody>
       </p:sp>
@@ -6452,6 +6548,7 @@
               </a:defRPr>
             </a:pPr>
             <a:r>
+              <a:rPr/>
               <a:t>看護師</a:t>
             </a:r>
           </a:p>
@@ -6488,6 +6585,7 @@
               </a:defRPr>
             </a:pPr>
             <a:r>
+              <a:rPr/>
               <a:t>AIアラートが出たとき「なぜ？」と1回聞く習慣</a:t>
             </a:r>
           </a:p>
@@ -6532,7 +6630,9 @@
           <a:bodyPr rtlCol="0" anchor="ctr"/>
           <a:lstStyle/>
           <a:p>
-            <a:pPr algn="ctr"/>
+            <a:pPr algn="ctr">
+              <a:defRPr/>
+            </a:pPr>
           </a:p>
         </p:txBody>
       </p:sp>
@@ -6567,6 +6667,7 @@
               </a:defRPr>
             </a:pPr>
             <a:r>
+              <a:rPr/>
               <a:t>薬剤師</a:t>
             </a:r>
           </a:p>
@@ -6603,6 +6704,7 @@
               </a:defRPr>
             </a:pPr>
             <a:r>
+              <a:rPr/>
               <a:t>AI処方チェックを「ダブルチェックの1つ」として位置づける</a:t>
             </a:r>
           </a:p>
@@ -6647,7 +6749,9 @@
           <a:bodyPr rtlCol="0" anchor="ctr"/>
           <a:lstStyle/>
           <a:p>
-            <a:pPr algn="ctr"/>
+            <a:pPr algn="ctr">
+              <a:defRPr/>
+            </a:pPr>
           </a:p>
         </p:txBody>
       </p:sp>
@@ -6682,6 +6786,7 @@
               </a:defRPr>
             </a:pPr>
             <a:r>
+              <a:rPr/>
               <a:t>リハビリ</a:t>
             </a:r>
           </a:p>
@@ -6718,6 +6823,7 @@
               </a:defRPr>
             </a:pPr>
             <a:r>
+              <a:rPr/>
               <a:t>AI提案を参考にしつつ、患者さんとの対話を最優先に</a:t>
             </a:r>
           </a:p>
@@ -6762,7 +6868,9 @@
           <a:bodyPr rtlCol="0" anchor="ctr"/>
           <a:lstStyle/>
           <a:p>
-            <a:pPr algn="ctr"/>
+            <a:pPr algn="ctr">
+              <a:defRPr/>
+            </a:pPr>
           </a:p>
         </p:txBody>
       </p:sp>
@@ -6797,6 +6905,7 @@
               </a:defRPr>
             </a:pPr>
             <a:r>
+              <a:rPr/>
               <a:t>事務</a:t>
             </a:r>
           </a:p>
@@ -6833,6 +6942,7 @@
               </a:defRPr>
             </a:pPr>
             <a:r>
+              <a:rPr/>
               <a:t>患者さんからAI質問→担当者につなぐ窓口を確認</a:t>
             </a:r>
           </a:p>
@@ -6877,7 +6987,9 @@
           <a:bodyPr rtlCol="0" anchor="ctr"/>
           <a:lstStyle/>
           <a:p>
-            <a:pPr algn="ctr"/>
+            <a:pPr algn="ctr">
+              <a:defRPr/>
+            </a:pPr>
           </a:p>
         </p:txBody>
       </p:sp>
@@ -6912,6 +7024,7 @@
               </a:defRPr>
             </a:pPr>
             <a:r>
+              <a:rPr/>
               <a:t>医師</a:t>
             </a:r>
           </a:p>
@@ -6948,6 +7061,7 @@
               </a:defRPr>
             </a:pPr>
             <a:r>
+              <a:rPr/>
               <a:t>AI推奨と判断が異なるとき、理由をカルテに一言メモ</a:t>
             </a:r>
           </a:p>
@@ -6992,7 +7106,9 @@
           <a:bodyPr rtlCol="0" anchor="ctr"/>
           <a:lstStyle/>
           <a:p>
-            <a:pPr algn="ctr"/>
+            <a:pPr algn="ctr">
+              <a:defRPr/>
+            </a:pPr>
           </a:p>
         </p:txBody>
       </p:sp>
@@ -7037,7 +7153,9 @@
           <a:bodyPr rtlCol="0" anchor="ctr"/>
           <a:lstStyle/>
           <a:p>
-            <a:pPr algn="ctr"/>
+            <a:pPr algn="ctr">
+              <a:defRPr/>
+            </a:pPr>
           </a:p>
         </p:txBody>
       </p:sp>
@@ -7072,10 +7190,12 @@
               </a:defRPr>
             </a:pPr>
             <a:r>
+              <a:rPr/>
               <a:t>「AIを怖がる」のではなく「AIと上手につきあう」。</a:t>
             </a:r>
             <a:br/>
             <a:r>
+              <a:rPr/>
               <a:t>その第一歩が、今日の6つのチェックポイントです。</a:t>
             </a:r>
           </a:p>
